--- a/диплом.pptx
+++ b/диплом.pptx
@@ -5,7 +5,7 @@
     <p:sldMasterId id="2147483648" r:id="rId1"/>
   </p:sldMasterIdLst>
   <p:notesMasterIdLst>
-    <p:notesMasterId r:id="rId23"/>
+    <p:notesMasterId r:id="rId24"/>
   </p:notesMasterIdLst>
   <p:sldIdLst>
     <p:sldId id="256" r:id="rId2"/>
@@ -21,24 +21,25 @@
     <p:sldId id="266" r:id="rId12"/>
     <p:sldId id="267" r:id="rId13"/>
     <p:sldId id="268" r:id="rId14"/>
-    <p:sldId id="269" r:id="rId15"/>
-    <p:sldId id="270" r:id="rId16"/>
-    <p:sldId id="271" r:id="rId17"/>
-    <p:sldId id="272" r:id="rId18"/>
-    <p:sldId id="273" r:id="rId19"/>
-    <p:sldId id="274" r:id="rId20"/>
-    <p:sldId id="276" r:id="rId21"/>
-    <p:sldId id="277" r:id="rId22"/>
+    <p:sldId id="278" r:id="rId15"/>
+    <p:sldId id="269" r:id="rId16"/>
+    <p:sldId id="270" r:id="rId17"/>
+    <p:sldId id="271" r:id="rId18"/>
+    <p:sldId id="272" r:id="rId19"/>
+    <p:sldId id="273" r:id="rId20"/>
+    <p:sldId id="274" r:id="rId21"/>
+    <p:sldId id="276" r:id="rId22"/>
+    <p:sldId id="277" r:id="rId23"/>
   </p:sldIdLst>
   <p:sldSz cx="16256000" cy="9144000"/>
   <p:notesSz cx="9144000" cy="16256000"/>
   <p:embeddedFontLst>
     <p:embeddedFont>
       <p:font typeface="Calibri" panose="020F0502020204030204" pitchFamily="34" charset="0"/>
-      <p:regular r:id="rId24"/>
-      <p:bold r:id="rId25"/>
-      <p:italic r:id="rId26"/>
-      <p:boldItalic r:id="rId27"/>
+      <p:regular r:id="rId25"/>
+      <p:bold r:id="rId26"/>
+      <p:italic r:id="rId27"/>
+      <p:boldItalic r:id="rId28"/>
     </p:embeddedFont>
   </p:embeddedFontLst>
   <p:defaultTextStyle>
@@ -754,7 +755,7 @@
           <a:p>
             <a:fld id="{F7021451-1387-4CA6-816F-3879F97B5CBC}" type="slidenum">
               <a:rPr lang="en-US"/>
-              <a:t>14</a:t>
+              <a:t>15</a:t>
             </a:fld>
             <a:endParaRPr lang="en-US"/>
           </a:p>
@@ -838,7 +839,7 @@
           <a:p>
             <a:fld id="{F7021451-1387-4CA6-816F-3879F97B5CBC}" type="slidenum">
               <a:rPr lang="en-US"/>
-              <a:t>15</a:t>
+              <a:t>16</a:t>
             </a:fld>
             <a:endParaRPr lang="en-US"/>
           </a:p>
@@ -922,7 +923,7 @@
           <a:p>
             <a:fld id="{F7021451-1387-4CA6-816F-3879F97B5CBC}" type="slidenum">
               <a:rPr lang="en-US"/>
-              <a:t>16</a:t>
+              <a:t>17</a:t>
             </a:fld>
             <a:endParaRPr lang="en-US"/>
           </a:p>
@@ -1006,7 +1007,7 @@
           <a:p>
             <a:fld id="{F7021451-1387-4CA6-816F-3879F97B5CBC}" type="slidenum">
               <a:rPr lang="en-US"/>
-              <a:t>17</a:t>
+              <a:t>18</a:t>
             </a:fld>
             <a:endParaRPr lang="en-US"/>
           </a:p>
@@ -1090,7 +1091,7 @@
           <a:p>
             <a:fld id="{F7021451-1387-4CA6-816F-3879F97B5CBC}" type="slidenum">
               <a:rPr lang="en-US"/>
-              <a:t>18</a:t>
+              <a:t>19</a:t>
             </a:fld>
             <a:endParaRPr lang="en-US"/>
           </a:p>
@@ -1174,7 +1175,7 @@
           <a:p>
             <a:fld id="{F7021451-1387-4CA6-816F-3879F97B5CBC}" type="slidenum">
               <a:rPr lang="en-US"/>
-              <a:t>19</a:t>
+              <a:t>20</a:t>
             </a:fld>
             <a:endParaRPr lang="en-US"/>
           </a:p>
@@ -1342,7 +1343,7 @@
           <a:p>
             <a:fld id="{F7021451-1387-4CA6-816F-3879F97B5CBC}" type="slidenum">
               <a:rPr lang="en-US"/>
-              <a:t>20</a:t>
+              <a:t>21</a:t>
             </a:fld>
             <a:endParaRPr lang="en-US"/>
           </a:p>
@@ -1426,7 +1427,7 @@
           <a:p>
             <a:fld id="{F7021451-1387-4CA6-816F-3879F97B5CBC}" type="slidenum">
               <a:rPr lang="en-US"/>
-              <a:t>21</a:t>
+              <a:t>22</a:t>
             </a:fld>
             <a:endParaRPr lang="en-US"/>
           </a:p>
@@ -2716,13 +2717,13 @@
   <p:clrMapOvr>
     <a:masterClrMapping/>
   </p:clrMapOvr>
-  <mc:AlternateContent xmlns:mc="http://schemas.openxmlformats.org/markup-compatibility/2006">
-    <mc:Choice xmlns:p159="http://schemas.microsoft.com/office/powerpoint/2015/09/main" Requires="p159">
+  <mc:AlternateContent xmlns:mc="http://schemas.openxmlformats.org/markup-compatibility/2006" xmlns:p159="http://schemas.microsoft.com/office/powerpoint/2015/09/main">
+    <mc:Choice Requires="p159">
       <p:transition xmlns:p14="http://schemas.microsoft.com/office/powerpoint/2010/main" spd="slow" p14:dur="1300" advTm="1294">
         <p159:morph option="byObject"/>
       </p:transition>
     </mc:Choice>
-    <mc:Fallback>
+    <mc:Fallback xmlns="">
       <p:transition spd="slow" advTm="1294">
         <p:fade/>
       </p:transition>
@@ -5519,6 +5520,108 @@
 
 <file path=ppt/slides/slide14.xml><?xml version="1.0" encoding="utf-8"?>
 <p:sld xmlns:a="http://schemas.openxmlformats.org/drawingml/2006/main" xmlns:r="http://schemas.openxmlformats.org/officeDocument/2006/relationships" xmlns:p="http://schemas.openxmlformats.org/presentationml/2006/main">
+  <p:cSld>
+    <p:spTree>
+      <p:nvGrpSpPr>
+        <p:cNvPr id="1" name=""/>
+        <p:cNvGrpSpPr/>
+        <p:nvPr/>
+      </p:nvGrpSpPr>
+      <p:grpSpPr>
+        <a:xfrm>
+          <a:off x="0" y="0"/>
+          <a:ext cx="0" cy="0"/>
+          <a:chOff x="0" y="0"/>
+          <a:chExt cx="0" cy="0"/>
+        </a:xfrm>
+      </p:grpSpPr>
+      <p:sp>
+        <p:nvSpPr>
+          <p:cNvPr id="3" name="TextBox 2">
+            <a:extLst>
+              <a:ext uri="{FF2B5EF4-FFF2-40B4-BE49-F238E27FC236}">
+                <a16:creationId xmlns:a16="http://schemas.microsoft.com/office/drawing/2014/main" id="{B79EAC66-7160-4355-B432-853E4389A029}"/>
+              </a:ext>
+            </a:extLst>
+          </p:cNvPr>
+          <p:cNvSpPr txBox="1"/>
+          <p:nvPr/>
+        </p:nvSpPr>
+        <p:spPr>
+          <a:xfrm>
+            <a:off x="2393275" y="2578967"/>
+            <a:ext cx="5826107" cy="461665"/>
+          </a:xfrm>
+          <a:prstGeom prst="rect">
+            <a:avLst/>
+          </a:prstGeom>
+          <a:noFill/>
+        </p:spPr>
+        <p:txBody>
+          <a:bodyPr wrap="square">
+            <a:spAutoFit/>
+          </a:bodyPr>
+          <a:lstStyle/>
+          <a:p>
+            <a:r>
+              <a:rPr lang="en-US" sz="2400" dirty="0">
+                <a:hlinkClick r:id="rId2"/>
+              </a:rPr>
+              <a:t>https://github.com/IgangdI/diplom</a:t>
+            </a:r>
+            <a:endParaRPr lang="ru-RU" sz="2400" dirty="0"/>
+          </a:p>
+        </p:txBody>
+      </p:sp>
+      <p:pic>
+        <p:nvPicPr>
+          <p:cNvPr id="4" name="Рисунок 3">
+            <a:extLst>
+              <a:ext uri="{FF2B5EF4-FFF2-40B4-BE49-F238E27FC236}">
+                <a16:creationId xmlns:a16="http://schemas.microsoft.com/office/drawing/2014/main" id="{B119FA74-44A8-4744-96E2-083B8088240B}"/>
+              </a:ext>
+            </a:extLst>
+          </p:cNvPr>
+          <p:cNvPicPr/>
+          <p:nvPr/>
+        </p:nvPicPr>
+        <p:blipFill>
+          <a:blip r:embed="rId3">
+            <a:extLst>
+              <a:ext uri="{28A0092B-C50C-407E-A947-70E740481C1C}">
+                <a14:useLocalDpi xmlns:a14="http://schemas.microsoft.com/office/drawing/2010/main" val="0"/>
+              </a:ext>
+            </a:extLst>
+          </a:blip>
+          <a:stretch>
+            <a:fillRect/>
+          </a:stretch>
+        </p:blipFill>
+        <p:spPr>
+          <a:xfrm>
+            <a:off x="9578213" y="1688672"/>
+            <a:ext cx="4724930" cy="4577902"/>
+          </a:xfrm>
+          <a:prstGeom prst="rect">
+            <a:avLst/>
+          </a:prstGeom>
+        </p:spPr>
+      </p:pic>
+    </p:spTree>
+    <p:extLst>
+      <p:ext uri="{BB962C8B-B14F-4D97-AF65-F5344CB8AC3E}">
+        <p14:creationId xmlns:p14="http://schemas.microsoft.com/office/powerpoint/2010/main" val="3480955553"/>
+      </p:ext>
+    </p:extLst>
+  </p:cSld>
+  <p:clrMapOvr>
+    <a:masterClrMapping/>
+  </p:clrMapOvr>
+</p:sld>
+</file>
+
+<file path=ppt/slides/slide15.xml><?xml version="1.0" encoding="utf-8"?>
+<p:sld xmlns:a="http://schemas.openxmlformats.org/drawingml/2006/main" xmlns:r="http://schemas.openxmlformats.org/officeDocument/2006/relationships" xmlns:p="http://schemas.openxmlformats.org/presentationml/2006/main">
   <p:cSld name="Slide 14">
     <p:bg>
       <p:bgPr>
@@ -5908,7 +6011,7 @@
 </p:sld>
 </file>
 
-<file path=ppt/slides/slide15.xml><?xml version="1.0" encoding="utf-8"?>
+<file path=ppt/slides/slide16.xml><?xml version="1.0" encoding="utf-8"?>
 <p:sld xmlns:a="http://schemas.openxmlformats.org/drawingml/2006/main" xmlns:r="http://schemas.openxmlformats.org/officeDocument/2006/relationships" xmlns:p="http://schemas.openxmlformats.org/presentationml/2006/main">
   <p:cSld name="Slide 15">
     <p:bg>
@@ -6226,7 +6329,7 @@
 </p:sld>
 </file>
 
-<file path=ppt/slides/slide16.xml><?xml version="1.0" encoding="utf-8"?>
+<file path=ppt/slides/slide17.xml><?xml version="1.0" encoding="utf-8"?>
 <p:sld xmlns:a="http://schemas.openxmlformats.org/drawingml/2006/main" xmlns:r="http://schemas.openxmlformats.org/officeDocument/2006/relationships" xmlns:p="http://schemas.openxmlformats.org/presentationml/2006/main">
   <p:cSld name="Slide 16">
     <p:bg>
@@ -6565,7 +6668,7 @@
 </p:sld>
 </file>
 
-<file path=ppt/slides/slide17.xml><?xml version="1.0" encoding="utf-8"?>
+<file path=ppt/slides/slide18.xml><?xml version="1.0" encoding="utf-8"?>
 <p:sld xmlns:a="http://schemas.openxmlformats.org/drawingml/2006/main" xmlns:r="http://schemas.openxmlformats.org/officeDocument/2006/relationships" xmlns:p="http://schemas.openxmlformats.org/presentationml/2006/main">
   <p:cSld name="Slide 17">
     <p:bg>
@@ -6945,7 +7048,7 @@
 </p:sld>
 </file>
 
-<file path=ppt/slides/slide18.xml><?xml version="1.0" encoding="utf-8"?>
+<file path=ppt/slides/slide19.xml><?xml version="1.0" encoding="utf-8"?>
 <p:sld xmlns:a="http://schemas.openxmlformats.org/drawingml/2006/main" xmlns:r="http://schemas.openxmlformats.org/officeDocument/2006/relationships" xmlns:p="http://schemas.openxmlformats.org/presentationml/2006/main">
   <p:cSld name="Slide 18">
     <p:bg>
@@ -7314,7 +7417,350 @@
 </p:sld>
 </file>
 
-<file path=ppt/slides/slide19.xml><?xml version="1.0" encoding="utf-8"?>
+<file path=ppt/slides/slide2.xml><?xml version="1.0" encoding="utf-8"?>
+<p:sld xmlns:a="http://schemas.openxmlformats.org/drawingml/2006/main" xmlns:r="http://schemas.openxmlformats.org/officeDocument/2006/relationships" xmlns:p="http://schemas.openxmlformats.org/presentationml/2006/main">
+  <p:cSld name="Slide 2">
+    <p:bg>
+      <p:bgPr>
+        <a:solidFill>
+          <a:srgbClr val="FFFFFF"/>
+        </a:solidFill>
+        <a:effectLst/>
+      </p:bgPr>
+    </p:bg>
+    <p:spTree>
+      <p:nvGrpSpPr>
+        <p:cNvPr id="1" name=""/>
+        <p:cNvGrpSpPr/>
+        <p:nvPr/>
+      </p:nvGrpSpPr>
+      <p:grpSpPr>
+        <a:xfrm>
+          <a:off x="0" y="0"/>
+          <a:ext cx="0" cy="0"/>
+          <a:chOff x="0" y="0"/>
+          <a:chExt cx="0" cy="0"/>
+        </a:xfrm>
+      </p:grpSpPr>
+      <p:sp>
+        <p:nvSpPr>
+          <p:cNvPr id="2" name="Text 0"/>
+          <p:cNvSpPr/>
+          <p:nvPr/>
+        </p:nvSpPr>
+        <p:spPr>
+          <a:xfrm>
+            <a:off x="1016000" y="635000"/>
+            <a:ext cx="7620000" cy="635000"/>
+          </a:xfrm>
+          <a:prstGeom prst="rect">
+            <a:avLst/>
+          </a:prstGeom>
+          <a:noFill/>
+          <a:ln/>
+        </p:spPr>
+        <p:txBody>
+          <a:bodyPr wrap="none" lIns="0" tIns="0" rIns="0" bIns="0" rtlCol="0" anchor="ctr"/>
+          <a:lstStyle/>
+          <a:p>
+            <a:pPr>
+              <a:lnSpc>
+                <a:spcPct val="100000"/>
+              </a:lnSpc>
+            </a:pPr>
+            <a:r>
+              <a:rPr lang="en-US" sz="3600" b="1" dirty="0">
+                <a:solidFill>
+                  <a:srgbClr val="000000"/>
+                </a:solidFill>
+                <a:latin typeface="Times New Roman" panose="02020603050405020304" pitchFamily="18" charset="0"/>
+                <a:ea typeface="QuattrocentoSans" pitchFamily="34" charset="-122"/>
+                <a:cs typeface="Times New Roman" panose="02020603050405020304" pitchFamily="18" charset="0"/>
+              </a:rPr>
+              <a:t>ЦЕЛЬ И ЗАДАЧИ</a:t>
+            </a:r>
+            <a:endParaRPr lang="en-US" sz="3600" dirty="0">
+              <a:latin typeface="Times New Roman" panose="02020603050405020304" pitchFamily="18" charset="0"/>
+              <a:cs typeface="Times New Roman" panose="02020603050405020304" pitchFamily="18" charset="0"/>
+            </a:endParaRPr>
+          </a:p>
+        </p:txBody>
+      </p:sp>
+      <p:sp>
+        <p:nvSpPr>
+          <p:cNvPr id="3" name="Text 1"/>
+          <p:cNvSpPr/>
+          <p:nvPr/>
+        </p:nvSpPr>
+        <p:spPr>
+          <a:xfrm>
+            <a:off x="1016000" y="1778000"/>
+            <a:ext cx="2540000" cy="444500"/>
+          </a:xfrm>
+          <a:prstGeom prst="rect">
+            <a:avLst/>
+          </a:prstGeom>
+          <a:noFill/>
+          <a:ln/>
+        </p:spPr>
+        <p:txBody>
+          <a:bodyPr wrap="none" lIns="0" tIns="0" rIns="0" bIns="0" rtlCol="0" anchor="ctr"/>
+          <a:lstStyle/>
+          <a:p>
+            <a:pPr>
+              <a:lnSpc>
+                <a:spcPct val="100000"/>
+              </a:lnSpc>
+            </a:pPr>
+            <a:r>
+              <a:rPr lang="en-US" sz="2400" b="1" dirty="0">
+                <a:solidFill>
+                  <a:srgbClr val="333333"/>
+                </a:solidFill>
+                <a:latin typeface="Times New Roman" panose="02020603050405020304" pitchFamily="18" charset="0"/>
+                <a:ea typeface="QuattrocentoSans" pitchFamily="34" charset="-122"/>
+                <a:cs typeface="Times New Roman" panose="02020603050405020304" pitchFamily="18" charset="0"/>
+              </a:rPr>
+              <a:t>Цель:</a:t>
+            </a:r>
+            <a:endParaRPr lang="en-US" sz="2400" dirty="0">
+              <a:latin typeface="Times New Roman" panose="02020603050405020304" pitchFamily="18" charset="0"/>
+              <a:cs typeface="Times New Roman" panose="02020603050405020304" pitchFamily="18" charset="0"/>
+            </a:endParaRPr>
+          </a:p>
+        </p:txBody>
+      </p:sp>
+      <p:sp>
+        <p:nvSpPr>
+          <p:cNvPr id="4" name="Text 2"/>
+          <p:cNvSpPr/>
+          <p:nvPr/>
+        </p:nvSpPr>
+        <p:spPr>
+          <a:xfrm>
+            <a:off x="1016000" y="2286000"/>
+            <a:ext cx="14224000" cy="1016000"/>
+          </a:xfrm>
+          <a:prstGeom prst="rect">
+            <a:avLst/>
+          </a:prstGeom>
+          <a:noFill/>
+          <a:ln/>
+        </p:spPr>
+        <p:txBody>
+          <a:bodyPr wrap="square" lIns="0" tIns="0" rIns="0" bIns="0" rtlCol="0" anchor="t"/>
+          <a:lstStyle/>
+          <a:p>
+            <a:pPr>
+              <a:lnSpc>
+                <a:spcPct val="150000"/>
+              </a:lnSpc>
+            </a:pPr>
+            <a:r>
+              <a:rPr lang="ru-RU" sz="2000" dirty="0">
+                <a:latin typeface="Times New Roman" panose="02020603050405020304" pitchFamily="18" charset="0"/>
+                <a:cs typeface="Times New Roman" panose="02020603050405020304" pitchFamily="18" charset="0"/>
+              </a:rPr>
+              <a:t>Разработка и создание информационной системы для автоматизированного управления деятельностью компьютерного магазина.</a:t>
+            </a:r>
+            <a:endParaRPr lang="en-US" sz="2000" dirty="0">
+              <a:latin typeface="Times New Roman" panose="02020603050405020304" pitchFamily="18" charset="0"/>
+              <a:cs typeface="Times New Roman" panose="02020603050405020304" pitchFamily="18" charset="0"/>
+            </a:endParaRPr>
+          </a:p>
+        </p:txBody>
+      </p:sp>
+      <p:sp>
+        <p:nvSpPr>
+          <p:cNvPr id="5" name="Text 3"/>
+          <p:cNvSpPr/>
+          <p:nvPr/>
+        </p:nvSpPr>
+        <p:spPr>
+          <a:xfrm>
+            <a:off x="1016000" y="3556000"/>
+            <a:ext cx="2540000" cy="444500"/>
+          </a:xfrm>
+          <a:prstGeom prst="rect">
+            <a:avLst/>
+          </a:prstGeom>
+          <a:noFill/>
+          <a:ln/>
+        </p:spPr>
+        <p:txBody>
+          <a:bodyPr wrap="none" lIns="0" tIns="0" rIns="0" bIns="0" rtlCol="0" anchor="ctr"/>
+          <a:lstStyle/>
+          <a:p>
+            <a:pPr>
+              <a:lnSpc>
+                <a:spcPct val="100000"/>
+              </a:lnSpc>
+            </a:pPr>
+            <a:r>
+              <a:rPr lang="en-US" sz="2400" b="1" dirty="0">
+                <a:solidFill>
+                  <a:srgbClr val="333333"/>
+                </a:solidFill>
+                <a:latin typeface="Times New Roman" panose="02020603050405020304" pitchFamily="18" charset="0"/>
+                <a:ea typeface="QuattrocentoSans" pitchFamily="34" charset="-122"/>
+                <a:cs typeface="Times New Roman" panose="02020603050405020304" pitchFamily="18" charset="0"/>
+              </a:rPr>
+              <a:t>Задачи:</a:t>
+            </a:r>
+            <a:endParaRPr lang="en-US" sz="2400" dirty="0">
+              <a:latin typeface="Times New Roman" panose="02020603050405020304" pitchFamily="18" charset="0"/>
+              <a:cs typeface="Times New Roman" panose="02020603050405020304" pitchFamily="18" charset="0"/>
+            </a:endParaRPr>
+          </a:p>
+        </p:txBody>
+      </p:sp>
+      <p:sp>
+        <p:nvSpPr>
+          <p:cNvPr id="6" name="Text 4"/>
+          <p:cNvSpPr/>
+          <p:nvPr/>
+        </p:nvSpPr>
+        <p:spPr>
+          <a:xfrm>
+            <a:off x="1016000" y="4064000"/>
+            <a:ext cx="14224000" cy="1905000"/>
+          </a:xfrm>
+          <a:prstGeom prst="rect">
+            <a:avLst/>
+          </a:prstGeom>
+          <a:noFill/>
+          <a:ln/>
+        </p:spPr>
+        <p:txBody>
+          <a:bodyPr wrap="square" lIns="0" tIns="0" rIns="0" bIns="0" rtlCol="0" anchor="t"/>
+          <a:lstStyle/>
+          <a:p>
+            <a:pPr marL="317500" indent="-317500">
+              <a:lnSpc>
+                <a:spcPct val="150000"/>
+              </a:lnSpc>
+              <a:spcBef>
+                <a:spcPts val="10"/>
+              </a:spcBef>
+              <a:buSzPct val="100000"/>
+              <a:buChar char="•"/>
+            </a:pPr>
+            <a:endParaRPr lang="en-US" sz="2000" dirty="0">
+              <a:latin typeface="Times New Roman" panose="02020603050405020304" pitchFamily="18" charset="0"/>
+              <a:cs typeface="Times New Roman" panose="02020603050405020304" pitchFamily="18" charset="0"/>
+            </a:endParaRPr>
+          </a:p>
+        </p:txBody>
+      </p:sp>
+      <p:sp>
+        <p:nvSpPr>
+          <p:cNvPr id="8" name="TextBox 7">
+            <a:extLst>
+              <a:ext uri="{FF2B5EF4-FFF2-40B4-BE49-F238E27FC236}">
+                <a16:creationId xmlns:a16="http://schemas.microsoft.com/office/drawing/2014/main" id="{0AB2310D-38F0-7F79-0E04-C12B0DC9DC28}"/>
+              </a:ext>
+            </a:extLst>
+          </p:cNvPr>
+          <p:cNvSpPr txBox="1"/>
+          <p:nvPr/>
+        </p:nvSpPr>
+        <p:spPr>
+          <a:xfrm>
+            <a:off x="1016000" y="4268647"/>
+            <a:ext cx="13890263" cy="2246769"/>
+          </a:xfrm>
+          <a:prstGeom prst="rect">
+            <a:avLst/>
+          </a:prstGeom>
+          <a:noFill/>
+        </p:spPr>
+        <p:txBody>
+          <a:bodyPr wrap="square">
+            <a:spAutoFit/>
+          </a:bodyPr>
+          <a:lstStyle/>
+          <a:p>
+            <a:pPr marL="285750" indent="-285750">
+              <a:buFont typeface="Arial" panose="020B0604020202020204" pitchFamily="34" charset="0"/>
+              <a:buChar char="•"/>
+            </a:pPr>
+            <a:r>
+              <a:rPr lang="ru-RU" sz="2000" dirty="0">
+                <a:latin typeface="Times New Roman" panose="02020603050405020304" pitchFamily="18" charset="0"/>
+                <a:cs typeface="Times New Roman" panose="02020603050405020304" pitchFamily="18" charset="0"/>
+              </a:rPr>
+              <a:t>На основании анализа бизнес-процессов компьютерного магазина сформулировать требования к информационной системе и составить основные разделы технического задания.</a:t>
+            </a:r>
+          </a:p>
+          <a:p>
+            <a:pPr marL="285750" indent="-285750">
+              <a:buFont typeface="Arial" panose="020B0604020202020204" pitchFamily="34" charset="0"/>
+              <a:buChar char="•"/>
+            </a:pPr>
+            <a:endParaRPr lang="ru-RU" sz="2000" dirty="0">
+              <a:latin typeface="Times New Roman" panose="02020603050405020304" pitchFamily="18" charset="0"/>
+              <a:cs typeface="Times New Roman" panose="02020603050405020304" pitchFamily="18" charset="0"/>
+            </a:endParaRPr>
+          </a:p>
+          <a:p>
+            <a:pPr marL="285750" indent="-285750">
+              <a:buFont typeface="Arial" panose="020B0604020202020204" pitchFamily="34" charset="0"/>
+              <a:buChar char="•"/>
+            </a:pPr>
+            <a:r>
+              <a:rPr lang="ru-RU" sz="2000" dirty="0">
+                <a:latin typeface="Times New Roman" panose="02020603050405020304" pitchFamily="18" charset="0"/>
+                <a:cs typeface="Times New Roman" panose="02020603050405020304" pitchFamily="18" charset="0"/>
+              </a:rPr>
+              <a:t>В соответствии с техническим заданием выполнить проектирование информационной системы, включая проектирование структуры базы данных и основных функциональных модулей.</a:t>
+            </a:r>
+          </a:p>
+          <a:p>
+            <a:pPr marL="285750" indent="-285750">
+              <a:buFont typeface="Arial" panose="020B0604020202020204" pitchFamily="34" charset="0"/>
+              <a:buChar char="•"/>
+            </a:pPr>
+            <a:endParaRPr lang="ru-RU" sz="2000" dirty="0">
+              <a:latin typeface="Times New Roman" panose="02020603050405020304" pitchFamily="18" charset="0"/>
+              <a:cs typeface="Times New Roman" panose="02020603050405020304" pitchFamily="18" charset="0"/>
+            </a:endParaRPr>
+          </a:p>
+          <a:p>
+            <a:pPr marL="285750" indent="-285750">
+              <a:buFont typeface="Arial" panose="020B0604020202020204" pitchFamily="34" charset="0"/>
+              <a:buChar char="•"/>
+            </a:pPr>
+            <a:r>
+              <a:rPr lang="ru-RU" sz="2000" dirty="0">
+                <a:latin typeface="Times New Roman" panose="02020603050405020304" pitchFamily="18" charset="0"/>
+                <a:cs typeface="Times New Roman" panose="02020603050405020304" pitchFamily="18" charset="0"/>
+              </a:rPr>
+              <a:t>В соответствии с техническим заданием разработать информационную систему в среде 1С:Предприятие.</a:t>
+            </a:r>
+          </a:p>
+        </p:txBody>
+      </p:sp>
+    </p:spTree>
+  </p:cSld>
+  <p:clrMapOvr>
+    <a:masterClrMapping/>
+  </p:clrMapOvr>
+  <mc:AlternateContent xmlns:mc="http://schemas.openxmlformats.org/markup-compatibility/2006" xmlns:p159="http://schemas.microsoft.com/office/powerpoint/2015/09/main">
+    <mc:Choice Requires="p159">
+      <p:transition xmlns:p14="http://schemas.microsoft.com/office/powerpoint/2010/main" spd="slow" p14:dur="1300">
+        <p159:morph option="byObject"/>
+      </p:transition>
+    </mc:Choice>
+    <mc:Fallback xmlns="">
+      <p:transition spd="slow">
+        <p:fade/>
+      </p:transition>
+    </mc:Fallback>
+  </mc:AlternateContent>
+</p:sld>
+</file>
+
+<file path=ppt/slides/slide20.xml><?xml version="1.0" encoding="utf-8"?>
 <p:sld xmlns:a="http://schemas.openxmlformats.org/drawingml/2006/main" xmlns:r="http://schemas.openxmlformats.org/officeDocument/2006/relationships" xmlns:p="http://schemas.openxmlformats.org/presentationml/2006/main">
   <p:cSld name="Slide 19">
     <p:bg>
@@ -7695,350 +8141,7 @@
 </p:sld>
 </file>
 
-<file path=ppt/slides/slide2.xml><?xml version="1.0" encoding="utf-8"?>
-<p:sld xmlns:a="http://schemas.openxmlformats.org/drawingml/2006/main" xmlns:r="http://schemas.openxmlformats.org/officeDocument/2006/relationships" xmlns:p="http://schemas.openxmlformats.org/presentationml/2006/main">
-  <p:cSld name="Slide 2">
-    <p:bg>
-      <p:bgPr>
-        <a:solidFill>
-          <a:srgbClr val="FFFFFF"/>
-        </a:solidFill>
-        <a:effectLst/>
-      </p:bgPr>
-    </p:bg>
-    <p:spTree>
-      <p:nvGrpSpPr>
-        <p:cNvPr id="1" name=""/>
-        <p:cNvGrpSpPr/>
-        <p:nvPr/>
-      </p:nvGrpSpPr>
-      <p:grpSpPr>
-        <a:xfrm>
-          <a:off x="0" y="0"/>
-          <a:ext cx="0" cy="0"/>
-          <a:chOff x="0" y="0"/>
-          <a:chExt cx="0" cy="0"/>
-        </a:xfrm>
-      </p:grpSpPr>
-      <p:sp>
-        <p:nvSpPr>
-          <p:cNvPr id="2" name="Text 0"/>
-          <p:cNvSpPr/>
-          <p:nvPr/>
-        </p:nvSpPr>
-        <p:spPr>
-          <a:xfrm>
-            <a:off x="1016000" y="635000"/>
-            <a:ext cx="7620000" cy="635000"/>
-          </a:xfrm>
-          <a:prstGeom prst="rect">
-            <a:avLst/>
-          </a:prstGeom>
-          <a:noFill/>
-          <a:ln/>
-        </p:spPr>
-        <p:txBody>
-          <a:bodyPr wrap="none" lIns="0" tIns="0" rIns="0" bIns="0" rtlCol="0" anchor="ctr"/>
-          <a:lstStyle/>
-          <a:p>
-            <a:pPr>
-              <a:lnSpc>
-                <a:spcPct val="100000"/>
-              </a:lnSpc>
-            </a:pPr>
-            <a:r>
-              <a:rPr lang="en-US" sz="3600" b="1" dirty="0">
-                <a:solidFill>
-                  <a:srgbClr val="000000"/>
-                </a:solidFill>
-                <a:latin typeface="Times New Roman" panose="02020603050405020304" pitchFamily="18" charset="0"/>
-                <a:ea typeface="QuattrocentoSans" pitchFamily="34" charset="-122"/>
-                <a:cs typeface="Times New Roman" panose="02020603050405020304" pitchFamily="18" charset="0"/>
-              </a:rPr>
-              <a:t>ЦЕЛЬ И ЗАДАЧИ</a:t>
-            </a:r>
-            <a:endParaRPr lang="en-US" sz="3600" dirty="0">
-              <a:latin typeface="Times New Roman" panose="02020603050405020304" pitchFamily="18" charset="0"/>
-              <a:cs typeface="Times New Roman" panose="02020603050405020304" pitchFamily="18" charset="0"/>
-            </a:endParaRPr>
-          </a:p>
-        </p:txBody>
-      </p:sp>
-      <p:sp>
-        <p:nvSpPr>
-          <p:cNvPr id="3" name="Text 1"/>
-          <p:cNvSpPr/>
-          <p:nvPr/>
-        </p:nvSpPr>
-        <p:spPr>
-          <a:xfrm>
-            <a:off x="1016000" y="1778000"/>
-            <a:ext cx="2540000" cy="444500"/>
-          </a:xfrm>
-          <a:prstGeom prst="rect">
-            <a:avLst/>
-          </a:prstGeom>
-          <a:noFill/>
-          <a:ln/>
-        </p:spPr>
-        <p:txBody>
-          <a:bodyPr wrap="none" lIns="0" tIns="0" rIns="0" bIns="0" rtlCol="0" anchor="ctr"/>
-          <a:lstStyle/>
-          <a:p>
-            <a:pPr>
-              <a:lnSpc>
-                <a:spcPct val="100000"/>
-              </a:lnSpc>
-            </a:pPr>
-            <a:r>
-              <a:rPr lang="en-US" sz="2400" b="1" dirty="0">
-                <a:solidFill>
-                  <a:srgbClr val="333333"/>
-                </a:solidFill>
-                <a:latin typeface="Times New Roman" panose="02020603050405020304" pitchFamily="18" charset="0"/>
-                <a:ea typeface="QuattrocentoSans" pitchFamily="34" charset="-122"/>
-                <a:cs typeface="Times New Roman" panose="02020603050405020304" pitchFamily="18" charset="0"/>
-              </a:rPr>
-              <a:t>Цель:</a:t>
-            </a:r>
-            <a:endParaRPr lang="en-US" sz="2400" dirty="0">
-              <a:latin typeface="Times New Roman" panose="02020603050405020304" pitchFamily="18" charset="0"/>
-              <a:cs typeface="Times New Roman" panose="02020603050405020304" pitchFamily="18" charset="0"/>
-            </a:endParaRPr>
-          </a:p>
-        </p:txBody>
-      </p:sp>
-      <p:sp>
-        <p:nvSpPr>
-          <p:cNvPr id="4" name="Text 2"/>
-          <p:cNvSpPr/>
-          <p:nvPr/>
-        </p:nvSpPr>
-        <p:spPr>
-          <a:xfrm>
-            <a:off x="1016000" y="2286000"/>
-            <a:ext cx="14224000" cy="1016000"/>
-          </a:xfrm>
-          <a:prstGeom prst="rect">
-            <a:avLst/>
-          </a:prstGeom>
-          <a:noFill/>
-          <a:ln/>
-        </p:spPr>
-        <p:txBody>
-          <a:bodyPr wrap="square" lIns="0" tIns="0" rIns="0" bIns="0" rtlCol="0" anchor="t"/>
-          <a:lstStyle/>
-          <a:p>
-            <a:pPr>
-              <a:lnSpc>
-                <a:spcPct val="150000"/>
-              </a:lnSpc>
-            </a:pPr>
-            <a:r>
-              <a:rPr lang="ru-RU" sz="2000" dirty="0">
-                <a:latin typeface="Times New Roman" panose="02020603050405020304" pitchFamily="18" charset="0"/>
-                <a:cs typeface="Times New Roman" panose="02020603050405020304" pitchFamily="18" charset="0"/>
-              </a:rPr>
-              <a:t>Разработка и создание информационной системы для автоматизированного управления деятельностью компьютерного магазина.</a:t>
-            </a:r>
-            <a:endParaRPr lang="en-US" sz="2000" dirty="0">
-              <a:latin typeface="Times New Roman" panose="02020603050405020304" pitchFamily="18" charset="0"/>
-              <a:cs typeface="Times New Roman" panose="02020603050405020304" pitchFamily="18" charset="0"/>
-            </a:endParaRPr>
-          </a:p>
-        </p:txBody>
-      </p:sp>
-      <p:sp>
-        <p:nvSpPr>
-          <p:cNvPr id="5" name="Text 3"/>
-          <p:cNvSpPr/>
-          <p:nvPr/>
-        </p:nvSpPr>
-        <p:spPr>
-          <a:xfrm>
-            <a:off x="1016000" y="3556000"/>
-            <a:ext cx="2540000" cy="444500"/>
-          </a:xfrm>
-          <a:prstGeom prst="rect">
-            <a:avLst/>
-          </a:prstGeom>
-          <a:noFill/>
-          <a:ln/>
-        </p:spPr>
-        <p:txBody>
-          <a:bodyPr wrap="none" lIns="0" tIns="0" rIns="0" bIns="0" rtlCol="0" anchor="ctr"/>
-          <a:lstStyle/>
-          <a:p>
-            <a:pPr>
-              <a:lnSpc>
-                <a:spcPct val="100000"/>
-              </a:lnSpc>
-            </a:pPr>
-            <a:r>
-              <a:rPr lang="en-US" sz="2400" b="1" dirty="0">
-                <a:solidFill>
-                  <a:srgbClr val="333333"/>
-                </a:solidFill>
-                <a:latin typeface="Times New Roman" panose="02020603050405020304" pitchFamily="18" charset="0"/>
-                <a:ea typeface="QuattrocentoSans" pitchFamily="34" charset="-122"/>
-                <a:cs typeface="Times New Roman" panose="02020603050405020304" pitchFamily="18" charset="0"/>
-              </a:rPr>
-              <a:t>Задачи:</a:t>
-            </a:r>
-            <a:endParaRPr lang="en-US" sz="2400" dirty="0">
-              <a:latin typeface="Times New Roman" panose="02020603050405020304" pitchFamily="18" charset="0"/>
-              <a:cs typeface="Times New Roman" panose="02020603050405020304" pitchFamily="18" charset="0"/>
-            </a:endParaRPr>
-          </a:p>
-        </p:txBody>
-      </p:sp>
-      <p:sp>
-        <p:nvSpPr>
-          <p:cNvPr id="6" name="Text 4"/>
-          <p:cNvSpPr/>
-          <p:nvPr/>
-        </p:nvSpPr>
-        <p:spPr>
-          <a:xfrm>
-            <a:off x="1016000" y="4064000"/>
-            <a:ext cx="14224000" cy="1905000"/>
-          </a:xfrm>
-          <a:prstGeom prst="rect">
-            <a:avLst/>
-          </a:prstGeom>
-          <a:noFill/>
-          <a:ln/>
-        </p:spPr>
-        <p:txBody>
-          <a:bodyPr wrap="square" lIns="0" tIns="0" rIns="0" bIns="0" rtlCol="0" anchor="t"/>
-          <a:lstStyle/>
-          <a:p>
-            <a:pPr marL="317500" indent="-317500">
-              <a:lnSpc>
-                <a:spcPct val="150000"/>
-              </a:lnSpc>
-              <a:spcBef>
-                <a:spcPts val="10"/>
-              </a:spcBef>
-              <a:buSzPct val="100000"/>
-              <a:buChar char="•"/>
-            </a:pPr>
-            <a:endParaRPr lang="en-US" sz="2000" dirty="0">
-              <a:latin typeface="Times New Roman" panose="02020603050405020304" pitchFamily="18" charset="0"/>
-              <a:cs typeface="Times New Roman" panose="02020603050405020304" pitchFamily="18" charset="0"/>
-            </a:endParaRPr>
-          </a:p>
-        </p:txBody>
-      </p:sp>
-      <p:sp>
-        <p:nvSpPr>
-          <p:cNvPr id="8" name="TextBox 7">
-            <a:extLst>
-              <a:ext uri="{FF2B5EF4-FFF2-40B4-BE49-F238E27FC236}">
-                <a16:creationId xmlns:a16="http://schemas.microsoft.com/office/drawing/2014/main" id="{0AB2310D-38F0-7F79-0E04-C12B0DC9DC28}"/>
-              </a:ext>
-            </a:extLst>
-          </p:cNvPr>
-          <p:cNvSpPr txBox="1"/>
-          <p:nvPr/>
-        </p:nvSpPr>
-        <p:spPr>
-          <a:xfrm>
-            <a:off x="1016000" y="4268647"/>
-            <a:ext cx="13890263" cy="2246769"/>
-          </a:xfrm>
-          <a:prstGeom prst="rect">
-            <a:avLst/>
-          </a:prstGeom>
-          <a:noFill/>
-        </p:spPr>
-        <p:txBody>
-          <a:bodyPr wrap="square">
-            <a:spAutoFit/>
-          </a:bodyPr>
-          <a:lstStyle/>
-          <a:p>
-            <a:pPr marL="285750" indent="-285750">
-              <a:buFont typeface="Arial" panose="020B0604020202020204" pitchFamily="34" charset="0"/>
-              <a:buChar char="•"/>
-            </a:pPr>
-            <a:r>
-              <a:rPr lang="ru-RU" sz="2000" dirty="0">
-                <a:latin typeface="Times New Roman" panose="02020603050405020304" pitchFamily="18" charset="0"/>
-                <a:cs typeface="Times New Roman" panose="02020603050405020304" pitchFamily="18" charset="0"/>
-              </a:rPr>
-              <a:t>На основании анализа бизнес-процессов компьютерного магазина сформулировать требования к информационной системе и составить основные разделы технического задания.</a:t>
-            </a:r>
-          </a:p>
-          <a:p>
-            <a:pPr marL="285750" indent="-285750">
-              <a:buFont typeface="Arial" panose="020B0604020202020204" pitchFamily="34" charset="0"/>
-              <a:buChar char="•"/>
-            </a:pPr>
-            <a:endParaRPr lang="ru-RU" sz="2000" dirty="0">
-              <a:latin typeface="Times New Roman" panose="02020603050405020304" pitchFamily="18" charset="0"/>
-              <a:cs typeface="Times New Roman" panose="02020603050405020304" pitchFamily="18" charset="0"/>
-            </a:endParaRPr>
-          </a:p>
-          <a:p>
-            <a:pPr marL="285750" indent="-285750">
-              <a:buFont typeface="Arial" panose="020B0604020202020204" pitchFamily="34" charset="0"/>
-              <a:buChar char="•"/>
-            </a:pPr>
-            <a:r>
-              <a:rPr lang="ru-RU" sz="2000" dirty="0">
-                <a:latin typeface="Times New Roman" panose="02020603050405020304" pitchFamily="18" charset="0"/>
-                <a:cs typeface="Times New Roman" panose="02020603050405020304" pitchFamily="18" charset="0"/>
-              </a:rPr>
-              <a:t>В соответствии с техническим заданием выполнить проектирование информационной системы, включая проектирование структуры базы данных и основных функциональных модулей.</a:t>
-            </a:r>
-          </a:p>
-          <a:p>
-            <a:pPr marL="285750" indent="-285750">
-              <a:buFont typeface="Arial" panose="020B0604020202020204" pitchFamily="34" charset="0"/>
-              <a:buChar char="•"/>
-            </a:pPr>
-            <a:endParaRPr lang="ru-RU" sz="2000" dirty="0">
-              <a:latin typeface="Times New Roman" panose="02020603050405020304" pitchFamily="18" charset="0"/>
-              <a:cs typeface="Times New Roman" panose="02020603050405020304" pitchFamily="18" charset="0"/>
-            </a:endParaRPr>
-          </a:p>
-          <a:p>
-            <a:pPr marL="285750" indent="-285750">
-              <a:buFont typeface="Arial" panose="020B0604020202020204" pitchFamily="34" charset="0"/>
-              <a:buChar char="•"/>
-            </a:pPr>
-            <a:r>
-              <a:rPr lang="ru-RU" sz="2000" dirty="0">
-                <a:latin typeface="Times New Roman" panose="02020603050405020304" pitchFamily="18" charset="0"/>
-                <a:cs typeface="Times New Roman" panose="02020603050405020304" pitchFamily="18" charset="0"/>
-              </a:rPr>
-              <a:t>В соответствии с техническим заданием разработать информационную систему в среде 1С:Предприятие.</a:t>
-            </a:r>
-          </a:p>
-        </p:txBody>
-      </p:sp>
-    </p:spTree>
-  </p:cSld>
-  <p:clrMapOvr>
-    <a:masterClrMapping/>
-  </p:clrMapOvr>
-  <mc:AlternateContent xmlns:mc="http://schemas.openxmlformats.org/markup-compatibility/2006" xmlns:p159="http://schemas.microsoft.com/office/powerpoint/2015/09/main">
-    <mc:Choice Requires="p159">
-      <p:transition xmlns:p14="http://schemas.microsoft.com/office/powerpoint/2010/main" spd="slow" p14:dur="1300">
-        <p159:morph option="byObject"/>
-      </p:transition>
-    </mc:Choice>
-    <mc:Fallback xmlns="">
-      <p:transition spd="slow">
-        <p:fade/>
-      </p:transition>
-    </mc:Fallback>
-  </mc:AlternateContent>
-</p:sld>
-</file>
-
-<file path=ppt/slides/slide20.xml><?xml version="1.0" encoding="utf-8"?>
+<file path=ppt/slides/slide21.xml><?xml version="1.0" encoding="utf-8"?>
 <p:sld xmlns:a="http://schemas.openxmlformats.org/drawingml/2006/main" xmlns:r="http://schemas.openxmlformats.org/officeDocument/2006/relationships" xmlns:p="http://schemas.openxmlformats.org/presentationml/2006/main">
   <p:cSld name="Slide 21">
     <p:bg>
@@ -8427,7 +8530,7 @@
 </p:sld>
 </file>
 
-<file path=ppt/slides/slide21.xml><?xml version="1.0" encoding="utf-8"?>
+<file path=ppt/slides/slide22.xml><?xml version="1.0" encoding="utf-8"?>
 <p:sld xmlns:a="http://schemas.openxmlformats.org/drawingml/2006/main" xmlns:r="http://schemas.openxmlformats.org/officeDocument/2006/relationships" xmlns:p="http://schemas.openxmlformats.org/presentationml/2006/main">
   <p:cSld name="Slide 22">
     <p:bg>

--- a/диплом.pptx
+++ b/диплом.pptx
@@ -2792,7 +2792,7 @@
                 <a:ea typeface="QuattrocentoSans" pitchFamily="34" charset="-122"/>
                 <a:cs typeface="Times New Roman" panose="02020603050405020304" pitchFamily="18" charset="0"/>
               </a:rPr>
-              <a:t>ДИАГРАММА ДЕЯТЕЛЬНОСТИ</a:t>
+              <a:t>ДИАГРАММА ДЕЯТЕЛЬНОСТИ (ACTIVITY DIAGRAM)</a:t>
             </a:r>
             <a:endParaRPr lang="en-US" sz="3600" dirty="0">
               <a:latin typeface="Times New Roman" panose="02020603050405020304" pitchFamily="18" charset="0"/>
@@ -3181,8 +3181,8 @@
         </p:blipFill>
         <p:spPr bwMode="auto">
           <a:xfrm rot="5400000">
-            <a:off x="8356030" y="2553948"/>
-            <a:ext cx="7810503" cy="4357233"/>
+            <a:off x="8572315" y="2708885"/>
+            <a:ext cx="7439280" cy="4418582"/>
           </a:xfrm>
           <a:prstGeom prst="rect">
             <a:avLst/>
@@ -3273,7 +3273,7 @@
                 <a:ea typeface="QuattrocentoSans" pitchFamily="34" charset="-122"/>
                 <a:cs typeface="Times New Roman" panose="02020603050405020304" pitchFamily="18" charset="0"/>
               </a:rPr>
-              <a:t>ДИАГРАММА ПОСЛЕДОВАТЕЛЬНОСТЕЙ</a:t>
+              <a:t>ДИАГРАММА ПОСЛЕДОВАТЕЛЬНОСТЕЙ (SEQUENCE DIAGRAM)</a:t>
             </a:r>
             <a:endParaRPr lang="en-US" sz="3600" dirty="0">
               <a:latin typeface="Times New Roman" panose="02020603050405020304" pitchFamily="18" charset="0"/>
@@ -3767,7 +3767,7 @@
                 <a:ea typeface="QuattrocentoSans" pitchFamily="34" charset="-122"/>
                 <a:cs typeface="Times New Roman" panose="02020603050405020304" pitchFamily="18" charset="0"/>
               </a:rPr>
-              <a:t>ER-ДИАГРАММА</a:t>
+              <a:t>ER-ДИАГРАММА (ENTITY-RELATIONSHIP DIAGRAM)</a:t>
             </a:r>
             <a:endParaRPr lang="en-US" sz="3600" dirty="0">
               <a:latin typeface="Times New Roman" panose="02020603050405020304" pitchFamily="18" charset="0"/>
@@ -3803,7 +3803,7 @@
               </a:lnSpc>
             </a:pPr>
             <a:r>
-              <a:rPr lang="ru-RU" sz="1200" b="1" dirty="0">
+              <a:rPr lang="ru-RU" b="1" dirty="0">
                 <a:solidFill>
                   <a:srgbClr val="000000"/>
                 </a:solidFill>
@@ -3821,7 +3821,7 @@
               </a:lnSpc>
             </a:pPr>
             <a:r>
-              <a:rPr lang="ru-RU" sz="1200" dirty="0" err="1">
+              <a:rPr lang="ru-RU" dirty="0" err="1">
                 <a:solidFill>
                   <a:srgbClr val="000000"/>
                 </a:solidFill>
@@ -3832,7 +3832,7 @@
               <a:t>Одинадцать</a:t>
             </a:r>
             <a:r>
-              <a:rPr lang="ru-RU" sz="1200" dirty="0">
+              <a:rPr lang="ru-RU" dirty="0">
                 <a:solidFill>
                   <a:srgbClr val="000000"/>
                 </a:solidFill>
@@ -3860,7 +3860,7 @@
               <a:buNone/>
               <a:tabLst/>
             </a:pPr>
-            <a:endParaRPr kumimoji="0" lang="ru-RU" altLang="ru-RU" sz="1200" b="0" i="0" u="none" strike="noStrike" cap="none" normalizeH="0" baseline="0" dirty="0">
+            <a:endParaRPr kumimoji="0" lang="ru-RU" altLang="ru-RU" b="0" i="0" u="none" strike="noStrike" cap="none" normalizeH="0" baseline="0" dirty="0">
               <a:ln>
                 <a:noFill/>
               </a:ln>
@@ -3879,7 +3879,7 @@
               <a:tabLst/>
             </a:pPr>
             <a:r>
-              <a:rPr kumimoji="0" lang="ru-RU" altLang="ru-RU" sz="1200" b="1" i="0" u="none" strike="noStrike" cap="none" normalizeH="0" baseline="0" dirty="0">
+              <a:rPr kumimoji="0" lang="ru-RU" altLang="ru-RU" b="1" i="0" u="none" strike="noStrike" cap="none" normalizeH="0" baseline="0" dirty="0">
                 <a:ln>
                   <a:noFill/>
                 </a:ln>
@@ -3890,7 +3890,7 @@
               <a:t>Категория</a:t>
             </a:r>
             <a:r>
-              <a:rPr kumimoji="0" lang="ru-RU" altLang="ru-RU" sz="1200" b="0" i="0" u="none" strike="noStrike" cap="none" normalizeH="0" baseline="0" dirty="0">
+              <a:rPr kumimoji="0" lang="ru-RU" altLang="ru-RU" b="0" i="0" u="none" strike="noStrike" cap="none" normalizeH="0" baseline="0" dirty="0">
                 <a:ln>
                   <a:noFill/>
                 </a:ln>
@@ -3911,7 +3911,7 @@
               <a:tabLst/>
             </a:pPr>
             <a:r>
-              <a:rPr kumimoji="0" lang="ru-RU" altLang="ru-RU" sz="1200" b="1" i="0" u="none" strike="noStrike" cap="none" normalizeH="0" baseline="0" dirty="0">
+              <a:rPr kumimoji="0" lang="ru-RU" altLang="ru-RU" b="1" i="0" u="none" strike="noStrike" cap="none" normalizeH="0" baseline="0" dirty="0">
                 <a:ln>
                   <a:noFill/>
                 </a:ln>
@@ -3922,7 +3922,7 @@
               <a:t>Продукт</a:t>
             </a:r>
             <a:r>
-              <a:rPr kumimoji="0" lang="ru-RU" altLang="ru-RU" sz="1200" b="0" i="0" u="none" strike="noStrike" cap="none" normalizeH="0" baseline="0" dirty="0">
+              <a:rPr kumimoji="0" lang="ru-RU" altLang="ru-RU" b="0" i="0" u="none" strike="noStrike" cap="none" normalizeH="0" baseline="0" dirty="0">
                 <a:ln>
                   <a:noFill/>
                 </a:ln>
@@ -3943,7 +3943,7 @@
               <a:tabLst/>
             </a:pPr>
             <a:r>
-              <a:rPr kumimoji="0" lang="ru-RU" altLang="ru-RU" sz="1200" b="1" i="0" u="none" strike="noStrike" cap="none" normalizeH="0" baseline="0" dirty="0">
+              <a:rPr kumimoji="0" lang="ru-RU" altLang="ru-RU" b="1" i="0" u="none" strike="noStrike" cap="none" normalizeH="0" baseline="0" dirty="0">
                 <a:ln>
                   <a:noFill/>
                 </a:ln>
@@ -3954,7 +3954,7 @@
               <a:t>Заказ поставщику</a:t>
             </a:r>
             <a:r>
-              <a:rPr kumimoji="0" lang="ru-RU" altLang="ru-RU" sz="1200" b="0" i="0" u="none" strike="noStrike" cap="none" normalizeH="0" baseline="0" dirty="0">
+              <a:rPr kumimoji="0" lang="ru-RU" altLang="ru-RU" b="0" i="0" u="none" strike="noStrike" cap="none" normalizeH="0" baseline="0" dirty="0">
                 <a:ln>
                   <a:noFill/>
                 </a:ln>
@@ -3965,14 +3965,14 @@
               <a:t> — </a:t>
             </a:r>
             <a:r>
-              <a:rPr lang="ru-RU" altLang="ru-RU" sz="1200" dirty="0">
+              <a:rPr lang="ru-RU" altLang="ru-RU" dirty="0">
                 <a:latin typeface="Times New Roman" panose="02020603050405020304" pitchFamily="18" charset="0"/>
                 <a:cs typeface="Times New Roman" panose="02020603050405020304" pitchFamily="18" charset="0"/>
               </a:rPr>
               <a:t>поставщик, </a:t>
             </a:r>
             <a:r>
-              <a:rPr kumimoji="0" lang="ru-RU" altLang="ru-RU" sz="1200" b="0" i="0" u="none" strike="noStrike" cap="none" normalizeH="0" baseline="0" dirty="0">
+              <a:rPr kumimoji="0" lang="ru-RU" altLang="ru-RU" b="0" i="0" u="none" strike="noStrike" cap="none" normalizeH="0" baseline="0" dirty="0">
                 <a:ln>
                   <a:noFill/>
                 </a:ln>
@@ -3983,14 +3983,14 @@
               <a:t>дата заказа, ожидаемая дата поставки, сумма, пользователь. Связь 1:N с </a:t>
             </a:r>
             <a:r>
-              <a:rPr lang="ru-RU" altLang="ru-RU" sz="1200" dirty="0">
+              <a:rPr lang="ru-RU" altLang="ru-RU" dirty="0">
                 <a:latin typeface="Times New Roman" panose="02020603050405020304" pitchFamily="18" charset="0"/>
                 <a:cs typeface="Times New Roman" panose="02020603050405020304" pitchFamily="18" charset="0"/>
               </a:rPr>
               <a:t>Товары заказа поставщику</a:t>
             </a:r>
             <a:r>
-              <a:rPr kumimoji="0" lang="ru-RU" altLang="ru-RU" sz="1200" b="0" i="0" u="none" strike="noStrike" cap="none" normalizeH="0" baseline="0" dirty="0">
+              <a:rPr kumimoji="0" lang="ru-RU" altLang="ru-RU" b="0" i="0" u="none" strike="noStrike" cap="none" normalizeH="0" baseline="0" dirty="0">
                 <a:ln>
                   <a:noFill/>
                 </a:ln>
@@ -4000,7 +4000,7 @@
               </a:rPr>
               <a:t>.</a:t>
             </a:r>
-            <a:endParaRPr lang="ru-RU" altLang="ru-RU" sz="1200" dirty="0">
+            <a:endParaRPr lang="ru-RU" altLang="ru-RU" dirty="0">
               <a:latin typeface="Times New Roman" panose="02020603050405020304" pitchFamily="18" charset="0"/>
               <a:cs typeface="Times New Roman" panose="02020603050405020304" pitchFamily="18" charset="0"/>
             </a:endParaRPr>
@@ -4015,7 +4015,7 @@
               <a:tabLst/>
             </a:pPr>
             <a:r>
-              <a:rPr kumimoji="0" lang="ru-RU" altLang="ru-RU" sz="1200" b="1" i="0" u="none" strike="noStrike" cap="none" normalizeH="0" baseline="0" dirty="0">
+              <a:rPr kumimoji="0" lang="ru-RU" altLang="ru-RU" b="1" i="0" u="none" strike="noStrike" cap="none" normalizeH="0" baseline="0" dirty="0">
                 <a:ln>
                   <a:noFill/>
                 </a:ln>
@@ -4026,7 +4026,7 @@
               <a:t>Товары заказа поставщику</a:t>
             </a:r>
             <a:r>
-              <a:rPr kumimoji="0" lang="ru-RU" altLang="ru-RU" sz="1200" b="0" i="0" u="none" strike="noStrike" cap="none" normalizeH="0" baseline="0" dirty="0">
+              <a:rPr kumimoji="0" lang="ru-RU" altLang="ru-RU" b="0" i="0" u="none" strike="noStrike" cap="none" normalizeH="0" baseline="0" dirty="0">
                 <a:ln>
                   <a:noFill/>
                 </a:ln>
@@ -4047,7 +4047,7 @@
               <a:tabLst/>
             </a:pPr>
             <a:r>
-              <a:rPr kumimoji="0" lang="ru-RU" altLang="ru-RU" sz="1200" b="1" i="0" u="none" strike="noStrike" cap="none" normalizeH="0" baseline="0" dirty="0">
+              <a:rPr kumimoji="0" lang="ru-RU" altLang="ru-RU" b="1" i="0" u="none" strike="noStrike" cap="none" normalizeH="0" baseline="0" dirty="0">
                 <a:ln>
                   <a:noFill/>
                 </a:ln>
@@ -4058,7 +4058,7 @@
               <a:t>Пользователь</a:t>
             </a:r>
             <a:r>
-              <a:rPr kumimoji="0" lang="ru-RU" altLang="ru-RU" sz="1200" b="0" i="0" u="none" strike="noStrike" cap="none" normalizeH="0" baseline="0" dirty="0">
+              <a:rPr kumimoji="0" lang="ru-RU" altLang="ru-RU" b="0" i="0" u="none" strike="noStrike" cap="none" normalizeH="0" baseline="0" dirty="0">
                 <a:ln>
                   <a:noFill/>
                 </a:ln>
@@ -4069,14 +4069,14 @@
               <a:t> — логин, пароль, почта, имя, фамилия, роль, активность. Связь 1:N с </a:t>
             </a:r>
             <a:r>
-              <a:rPr lang="ru-RU" altLang="ru-RU" sz="1200" dirty="0">
+              <a:rPr lang="ru-RU" altLang="ru-RU" dirty="0">
                 <a:latin typeface="Times New Roman" panose="02020603050405020304" pitchFamily="18" charset="0"/>
                 <a:cs typeface="Times New Roman" panose="02020603050405020304" pitchFamily="18" charset="0"/>
               </a:rPr>
               <a:t>Заказ поставщику, Продажа</a:t>
             </a:r>
             <a:r>
-              <a:rPr kumimoji="0" lang="ru-RU" altLang="ru-RU" sz="1200" b="0" i="0" u="none" strike="noStrike" cap="none" normalizeH="0" baseline="0" dirty="0">
+              <a:rPr kumimoji="0" lang="ru-RU" altLang="ru-RU" b="0" i="0" u="none" strike="noStrike" cap="none" normalizeH="0" baseline="0" dirty="0">
                 <a:ln>
                   <a:noFill/>
                 </a:ln>
@@ -4097,7 +4097,7 @@
               <a:tabLst/>
             </a:pPr>
             <a:r>
-              <a:rPr kumimoji="0" lang="ru-RU" altLang="ru-RU" sz="1200" b="1" i="0" u="none" strike="noStrike" cap="none" normalizeH="0" baseline="0" dirty="0">
+              <a:rPr kumimoji="0" lang="ru-RU" altLang="ru-RU" b="1" i="0" u="none" strike="noStrike" cap="none" normalizeH="0" baseline="0" dirty="0">
                 <a:ln>
                   <a:noFill/>
                 </a:ln>
@@ -4108,7 +4108,7 @@
               <a:t>Склад</a:t>
             </a:r>
             <a:r>
-              <a:rPr kumimoji="0" lang="ru-RU" altLang="ru-RU" sz="1200" b="0" i="0" u="none" strike="noStrike" cap="none" normalizeH="0" baseline="0" dirty="0">
+              <a:rPr kumimoji="0" lang="ru-RU" altLang="ru-RU" b="0" i="0" u="none" strike="noStrike" cap="none" normalizeH="0" baseline="0" dirty="0">
                 <a:ln>
                   <a:noFill/>
                 </a:ln>
@@ -4129,7 +4129,7 @@
               <a:tabLst/>
             </a:pPr>
             <a:r>
-              <a:rPr kumimoji="0" lang="ru-RU" altLang="ru-RU" sz="1200" b="1" i="0" u="none" strike="noStrike" cap="none" normalizeH="0" baseline="0" dirty="0">
+              <a:rPr kumimoji="0" lang="ru-RU" altLang="ru-RU" b="1" i="0" u="none" strike="noStrike" cap="none" normalizeH="0" baseline="0" dirty="0">
                 <a:ln>
                   <a:noFill/>
                 </a:ln>
@@ -4140,7 +4140,7 @@
               <a:t>Проданные товары </a:t>
             </a:r>
             <a:r>
-              <a:rPr kumimoji="0" lang="ru-RU" altLang="ru-RU" sz="1200" b="0" i="0" u="none" strike="noStrike" cap="none" normalizeH="0" baseline="0" dirty="0">
+              <a:rPr kumimoji="0" lang="ru-RU" altLang="ru-RU" b="0" i="0" u="none" strike="noStrike" cap="none" normalizeH="0" baseline="0" dirty="0">
                 <a:ln>
                   <a:noFill/>
                 </a:ln>
@@ -4150,255 +4150,6 @@
               </a:rPr>
               <a:t>— номер продажи, номер склада, количество, цена продажи за единицу.</a:t>
             </a:r>
-          </a:p>
-          <a:p>
-            <a:pPr marR="0" lvl="0" algn="just" defTabSz="914400" rtl="0" eaLnBrk="0" fontAlgn="base" latinLnBrk="0" hangingPunct="0">
-              <a:lnSpc>
-                <a:spcPct val="150000"/>
-              </a:lnSpc>
-              <a:buClrTx/>
-              <a:buSzTx/>
-              <a:tabLst/>
-            </a:pPr>
-            <a:r>
-              <a:rPr lang="ru-RU" altLang="ru-RU" sz="1200" b="1" dirty="0">
-                <a:latin typeface="Times New Roman" panose="02020603050405020304" pitchFamily="18" charset="0"/>
-                <a:cs typeface="Times New Roman" panose="02020603050405020304" pitchFamily="18" charset="0"/>
-              </a:rPr>
-              <a:t>Продажа </a:t>
-            </a:r>
-            <a:r>
-              <a:rPr kumimoji="0" lang="ru-RU" altLang="ru-RU" sz="1200" b="0" i="0" u="none" strike="noStrike" cap="none" normalizeH="0" baseline="0" dirty="0">
-                <a:ln>
-                  <a:noFill/>
-                </a:ln>
-                <a:effectLst/>
-                <a:latin typeface="Times New Roman" panose="02020603050405020304" pitchFamily="18" charset="0"/>
-                <a:cs typeface="Times New Roman" panose="02020603050405020304" pitchFamily="18" charset="0"/>
-              </a:rPr>
-              <a:t>— дата продажи, клиент, менеджер, сумма, метод оплаты, статус. </a:t>
-            </a:r>
-            <a:r>
-              <a:rPr lang="ru-RU" sz="1200" b="0" i="0" kern="1200" baseline="0" dirty="0">
-                <a:ln>
-                  <a:noFill/>
-                </a:ln>
-                <a:solidFill>
-                  <a:srgbClr val="000000"/>
-                </a:solidFill>
-                <a:effectLst/>
-                <a:latin typeface="Times New Roman" panose="02020603050405020304" pitchFamily="18" charset="0"/>
-                <a:ea typeface="+mn-ea"/>
-                <a:cs typeface="Times New Roman" panose="02020603050405020304" pitchFamily="18" charset="0"/>
-              </a:rPr>
-              <a:t>Связь 1:N с Проданные товары, Сборочный заказ</a:t>
-            </a:r>
-            <a:r>
-              <a:rPr lang="ru-RU" sz="1200" kern="1200" dirty="0">
-                <a:solidFill>
-                  <a:srgbClr val="000000"/>
-                </a:solidFill>
-                <a:latin typeface="Times New Roman" panose="02020603050405020304" pitchFamily="18" charset="0"/>
-                <a:ea typeface="+mn-ea"/>
-                <a:cs typeface="Times New Roman" panose="02020603050405020304" pitchFamily="18" charset="0"/>
-              </a:rPr>
-              <a:t>.</a:t>
-            </a:r>
-            <a:endParaRPr kumimoji="0" lang="ru-RU" altLang="ru-RU" sz="1200" b="1" i="0" u="none" strike="noStrike" cap="none" normalizeH="0" baseline="0" dirty="0">
-              <a:ln>
-                <a:noFill/>
-              </a:ln>
-              <a:effectLst/>
-              <a:latin typeface="Times New Roman" panose="02020603050405020304" pitchFamily="18" charset="0"/>
-              <a:cs typeface="Times New Roman" panose="02020603050405020304" pitchFamily="18" charset="0"/>
-            </a:endParaRPr>
-          </a:p>
-          <a:p>
-            <a:pPr>
-              <a:lnSpc>
-                <a:spcPct val="150000"/>
-              </a:lnSpc>
-            </a:pPr>
-            <a:r>
-              <a:rPr lang="ru-RU" sz="1200" b="1" dirty="0">
-                <a:solidFill>
-                  <a:srgbClr val="000000"/>
-                </a:solidFill>
-                <a:latin typeface="Times New Roman" panose="02020603050405020304" pitchFamily="18" charset="0"/>
-                <a:ea typeface="QuattrocentoSans" pitchFamily="34" charset="-122"/>
-                <a:cs typeface="Times New Roman" panose="02020603050405020304" pitchFamily="18" charset="0"/>
-              </a:rPr>
-              <a:t>Сборочный заказ </a:t>
-            </a:r>
-            <a:r>
-              <a:rPr lang="ru-RU" sz="1200" dirty="0">
-                <a:solidFill>
-                  <a:srgbClr val="000000"/>
-                </a:solidFill>
-                <a:latin typeface="Times New Roman" panose="02020603050405020304" pitchFamily="18" charset="0"/>
-                <a:ea typeface="QuattrocentoSans" pitchFamily="34" charset="-122"/>
-                <a:cs typeface="Times New Roman" panose="02020603050405020304" pitchFamily="18" charset="0"/>
-              </a:rPr>
-              <a:t>— номер сборки, номер продажи, номер сборщика (пользователь), список компонентов, статус, дата создания, дата завершения.</a:t>
-            </a:r>
-          </a:p>
-          <a:p>
-            <a:pPr>
-              <a:lnSpc>
-                <a:spcPct val="150000"/>
-              </a:lnSpc>
-            </a:pPr>
-            <a:r>
-              <a:rPr lang="ru-RU" sz="1200" b="1" dirty="0">
-                <a:solidFill>
-                  <a:srgbClr val="000000"/>
-                </a:solidFill>
-                <a:latin typeface="Times New Roman" panose="02020603050405020304" pitchFamily="18" charset="0"/>
-                <a:ea typeface="QuattrocentoSans" pitchFamily="34" charset="-122"/>
-                <a:cs typeface="Times New Roman" panose="02020603050405020304" pitchFamily="18" charset="0"/>
-              </a:rPr>
-              <a:t>Клиент </a:t>
-            </a:r>
-            <a:r>
-              <a:rPr lang="ru-RU" sz="1200" dirty="0">
-                <a:solidFill>
-                  <a:srgbClr val="000000"/>
-                </a:solidFill>
-                <a:latin typeface="Times New Roman" panose="02020603050405020304" pitchFamily="18" charset="0"/>
-                <a:ea typeface="QuattrocentoSans" pitchFamily="34" charset="-122"/>
-                <a:cs typeface="Times New Roman" panose="02020603050405020304" pitchFamily="18" charset="0"/>
-              </a:rPr>
-              <a:t>— ФИО, телефон, </a:t>
-            </a:r>
-            <a:r>
-              <a:rPr lang="ru-RU" sz="1200" dirty="0" err="1">
-                <a:solidFill>
-                  <a:srgbClr val="000000"/>
-                </a:solidFill>
-                <a:latin typeface="Times New Roman" panose="02020603050405020304" pitchFamily="18" charset="0"/>
-                <a:ea typeface="QuattrocentoSans" pitchFamily="34" charset="-122"/>
-                <a:cs typeface="Times New Roman" panose="02020603050405020304" pitchFamily="18" charset="0"/>
-              </a:rPr>
-              <a:t>email</a:t>
-            </a:r>
-            <a:r>
-              <a:rPr lang="ru-RU" sz="1200" dirty="0">
-                <a:solidFill>
-                  <a:srgbClr val="000000"/>
-                </a:solidFill>
-                <a:latin typeface="Times New Roman" panose="02020603050405020304" pitchFamily="18" charset="0"/>
-                <a:ea typeface="QuattrocentoSans" pitchFamily="34" charset="-122"/>
-                <a:cs typeface="Times New Roman" panose="02020603050405020304" pitchFamily="18" charset="0"/>
-              </a:rPr>
-              <a:t>. </a:t>
-            </a:r>
-            <a:r>
-              <a:rPr kumimoji="0" lang="ru-RU" altLang="ru-RU" sz="1200" b="0" i="0" u="none" strike="noStrike" cap="none" normalizeH="0" baseline="0" dirty="0">
-                <a:ln>
-                  <a:noFill/>
-                </a:ln>
-                <a:effectLst/>
-                <a:latin typeface="Times New Roman" panose="02020603050405020304" pitchFamily="18" charset="0"/>
-                <a:cs typeface="Times New Roman" panose="02020603050405020304" pitchFamily="18" charset="0"/>
-              </a:rPr>
-              <a:t>Связь 1:N с Продажа.</a:t>
-            </a:r>
-            <a:endParaRPr lang="ru-RU" sz="1200" dirty="0">
-              <a:solidFill>
-                <a:srgbClr val="000000"/>
-              </a:solidFill>
-              <a:latin typeface="Times New Roman" panose="02020603050405020304" pitchFamily="18" charset="0"/>
-              <a:ea typeface="QuattrocentoSans" pitchFamily="34" charset="-122"/>
-              <a:cs typeface="Times New Roman" panose="02020603050405020304" pitchFamily="18" charset="0"/>
-            </a:endParaRPr>
-          </a:p>
-          <a:p>
-            <a:pPr>
-              <a:lnSpc>
-                <a:spcPct val="150000"/>
-              </a:lnSpc>
-            </a:pPr>
-            <a:r>
-              <a:rPr lang="ru-RU" sz="1200" b="1" dirty="0">
-                <a:solidFill>
-                  <a:srgbClr val="000000"/>
-                </a:solidFill>
-                <a:latin typeface="Times New Roman" panose="02020603050405020304" pitchFamily="18" charset="0"/>
-                <a:ea typeface="QuattrocentoSans" pitchFamily="34" charset="-122"/>
-                <a:cs typeface="Times New Roman" panose="02020603050405020304" pitchFamily="18" charset="0"/>
-              </a:rPr>
-              <a:t>Поставщик </a:t>
-            </a:r>
-            <a:r>
-              <a:rPr lang="ru-RU" sz="1200" dirty="0">
-                <a:solidFill>
-                  <a:srgbClr val="000000"/>
-                </a:solidFill>
-                <a:latin typeface="Times New Roman" panose="02020603050405020304" pitchFamily="18" charset="0"/>
-                <a:ea typeface="QuattrocentoSans" pitchFamily="34" charset="-122"/>
-                <a:cs typeface="Times New Roman" panose="02020603050405020304" pitchFamily="18" charset="0"/>
-              </a:rPr>
-              <a:t>— название компании, контактное лицо, телефон, </a:t>
-            </a:r>
-            <a:r>
-              <a:rPr lang="ru-RU" sz="1200" dirty="0" err="1">
-                <a:solidFill>
-                  <a:srgbClr val="000000"/>
-                </a:solidFill>
-                <a:latin typeface="Times New Roman" panose="02020603050405020304" pitchFamily="18" charset="0"/>
-                <a:ea typeface="QuattrocentoSans" pitchFamily="34" charset="-122"/>
-                <a:cs typeface="Times New Roman" panose="02020603050405020304" pitchFamily="18" charset="0"/>
-              </a:rPr>
-              <a:t>email</a:t>
-            </a:r>
-            <a:r>
-              <a:rPr lang="ru-RU" sz="1200" dirty="0">
-                <a:solidFill>
-                  <a:srgbClr val="000000"/>
-                </a:solidFill>
-                <a:latin typeface="Times New Roman" panose="02020603050405020304" pitchFamily="18" charset="0"/>
-                <a:ea typeface="QuattrocentoSans" pitchFamily="34" charset="-122"/>
-                <a:cs typeface="Times New Roman" panose="02020603050405020304" pitchFamily="18" charset="0"/>
-              </a:rPr>
-              <a:t>. </a:t>
-            </a:r>
-            <a:r>
-              <a:rPr kumimoji="0" lang="ru-RU" altLang="ru-RU" sz="1200" b="0" i="0" u="none" strike="noStrike" cap="none" normalizeH="0" baseline="0" dirty="0">
-                <a:ln>
-                  <a:noFill/>
-                </a:ln>
-                <a:effectLst/>
-                <a:latin typeface="Times New Roman" panose="02020603050405020304" pitchFamily="18" charset="0"/>
-                <a:cs typeface="Times New Roman" panose="02020603050405020304" pitchFamily="18" charset="0"/>
-              </a:rPr>
-              <a:t>Связь 1:N с </a:t>
-            </a:r>
-            <a:r>
-              <a:rPr lang="ru-RU" altLang="ru-RU" sz="1200" dirty="0">
-                <a:latin typeface="Times New Roman" panose="02020603050405020304" pitchFamily="18" charset="0"/>
-                <a:cs typeface="Times New Roman" panose="02020603050405020304" pitchFamily="18" charset="0"/>
-              </a:rPr>
-              <a:t>Продукт</a:t>
-            </a:r>
-            <a:r>
-              <a:rPr kumimoji="0" lang="ru-RU" altLang="ru-RU" sz="1200" b="0" i="0" u="none" strike="noStrike" cap="none" normalizeH="0" baseline="0" dirty="0">
-                <a:ln>
-                  <a:noFill/>
-                </a:ln>
-                <a:effectLst/>
-                <a:latin typeface="Times New Roman" panose="02020603050405020304" pitchFamily="18" charset="0"/>
-                <a:cs typeface="Times New Roman" panose="02020603050405020304" pitchFamily="18" charset="0"/>
-              </a:rPr>
-              <a:t>.</a:t>
-            </a:r>
-            <a:endParaRPr lang="ru-RU" sz="1200" dirty="0">
-              <a:solidFill>
-                <a:srgbClr val="000000"/>
-              </a:solidFill>
-              <a:latin typeface="Times New Roman" panose="02020603050405020304" pitchFamily="18" charset="0"/>
-              <a:ea typeface="QuattrocentoSans" pitchFamily="34" charset="-122"/>
-              <a:cs typeface="Times New Roman" panose="02020603050405020304" pitchFamily="18" charset="0"/>
-            </a:endParaRPr>
           </a:p>
         </p:txBody>
       </p:sp>
@@ -4567,8 +4318,8 @@
         </p:blipFill>
         <p:spPr bwMode="auto">
           <a:xfrm>
-            <a:off x="8048787" y="559149"/>
-            <a:ext cx="7986794" cy="7902926"/>
+            <a:off x="8048787" y="1300807"/>
+            <a:ext cx="7986794" cy="7161267"/>
           </a:xfrm>
           <a:prstGeom prst="rect">
             <a:avLst/>
@@ -4579,95 +4330,6 @@
           </a:ln>
         </p:spPr>
       </p:pic>
-      <p:sp>
-        <p:nvSpPr>
-          <p:cNvPr id="14" name="Rectangle 11">
-            <a:extLst>
-              <a:ext uri="{FF2B5EF4-FFF2-40B4-BE49-F238E27FC236}">
-                <a16:creationId xmlns:a16="http://schemas.microsoft.com/office/drawing/2014/main" id="{B8C799C1-7FB2-4A81-9A86-2DBD0C025489}"/>
-              </a:ext>
-            </a:extLst>
-          </p:cNvPr>
-          <p:cNvSpPr>
-            <a:spLocks noChangeArrowheads="1"/>
-          </p:cNvSpPr>
-          <p:nvPr/>
-        </p:nvSpPr>
-        <p:spPr bwMode="auto">
-          <a:xfrm>
-            <a:off x="0" y="-284327"/>
-            <a:ext cx="65" cy="568654"/>
-          </a:xfrm>
-          <a:prstGeom prst="rect">
-            <a:avLst/>
-          </a:prstGeom>
-          <a:solidFill>
-            <a:srgbClr val="151517"/>
-          </a:solidFill>
-          <a:ln>
-            <a:noFill/>
-          </a:ln>
-          <a:effectLst/>
-          <a:extLst>
-            <a:ext uri="{91240B29-F687-4F45-9708-019B960494DF}">
-              <a14:hiddenLine xmlns:a14="http://schemas.microsoft.com/office/drawing/2010/main" w="9525">
-                <a:solidFill>
-                  <a:schemeClr val="tx1"/>
-                </a:solidFill>
-                <a:miter lim="800000"/>
-                <a:headEnd/>
-                <a:tailEnd/>
-              </a14:hiddenLine>
-            </a:ext>
-            <a:ext uri="{AF507438-7753-43E0-B8FC-AC1667EBCBE1}">
-              <a14:hiddenEffects xmlns:a14="http://schemas.microsoft.com/office/drawing/2010/main">
-                <a:effectLst>
-                  <a:outerShdw dist="35921" dir="2700000" algn="ctr" rotWithShape="0">
-                    <a:schemeClr val="bg2"/>
-                  </a:outerShdw>
-                </a:effectLst>
-              </a14:hiddenEffects>
-            </a:ext>
-          </a:extLst>
-        </p:spPr>
-        <p:txBody>
-          <a:bodyPr vert="horz" wrap="none" lIns="0" tIns="144417" rIns="0" bIns="144417" numCol="1" anchor="ctr" anchorCtr="0" compatLnSpc="1">
-            <a:prstTxWarp prst="textNoShape">
-              <a:avLst/>
-            </a:prstTxWarp>
-            <a:spAutoFit/>
-          </a:bodyPr>
-          <a:lstStyle/>
-          <a:p>
-            <a:pPr marL="0" marR="0" lvl="0" indent="0" algn="l" defTabSz="914400" rtl="0" eaLnBrk="0" fontAlgn="base" latinLnBrk="0" hangingPunct="0">
-              <a:lnSpc>
-                <a:spcPct val="100000"/>
-              </a:lnSpc>
-              <a:spcBef>
-                <a:spcPct val="0"/>
-              </a:spcBef>
-              <a:spcAft>
-                <a:spcPct val="0"/>
-              </a:spcAft>
-              <a:buClrTx/>
-              <a:buSzTx/>
-              <a:buFontTx/>
-              <a:buNone/>
-              <a:tabLst/>
-            </a:pPr>
-            <a:endParaRPr kumimoji="0" lang="ru-RU" altLang="ru-RU" sz="1800" b="0" i="0" u="none" strike="noStrike" cap="none" normalizeH="0" baseline="0" dirty="0">
-              <a:ln>
-                <a:noFill/>
-              </a:ln>
-              <a:solidFill>
-                <a:schemeClr val="tx1"/>
-              </a:solidFill>
-              <a:effectLst/>
-              <a:latin typeface="Arial" panose="020B0604020202020204" pitchFamily="34" charset="0"/>
-            </a:endParaRPr>
-          </a:p>
-        </p:txBody>
-      </p:sp>
       <p:sp>
         <p:nvSpPr>
           <p:cNvPr id="15" name="Rectangle 12">
@@ -4897,7 +4559,7 @@
                 <a:ea typeface="QuattrocentoSans" pitchFamily="34" charset="-122"/>
                 <a:cs typeface="Times New Roman" panose="02020603050405020304" pitchFamily="18" charset="0"/>
               </a:rPr>
-              <a:t>ДИАГРАММА КЛАССОВ</a:t>
+              <a:t>ДИАГРАММА КЛАССОВ (CLASS DIAGRAM)</a:t>
             </a:r>
             <a:endParaRPr lang="en-US" sz="3600" dirty="0">
               <a:latin typeface="Times New Roman" panose="02020603050405020304" pitchFamily="18" charset="0"/>
@@ -4933,7 +4595,7 @@
               </a:lnSpc>
             </a:pPr>
             <a:r>
-              <a:rPr lang="ru-RU" sz="1100" b="1" dirty="0">
+              <a:rPr lang="ru-RU" sz="1600" b="1" dirty="0">
                 <a:solidFill>
                   <a:srgbClr val="000000"/>
                 </a:solidFill>
@@ -4951,7 +4613,7 @@
               </a:lnSpc>
             </a:pPr>
             <a:r>
-              <a:rPr lang="ru-RU" sz="1100" b="1" dirty="0">
+              <a:rPr lang="ru-RU" sz="1600" b="1" dirty="0">
                 <a:solidFill>
                   <a:srgbClr val="000000"/>
                 </a:solidFill>
@@ -4968,7 +4630,7 @@
                 <a:spcPct val="150000"/>
               </a:lnSpc>
             </a:pPr>
-            <a:endParaRPr lang="ru-RU" sz="1100" dirty="0">
+            <a:endParaRPr lang="ru-RU" sz="1600" dirty="0">
               <a:solidFill>
                 <a:srgbClr val="000000"/>
               </a:solidFill>
@@ -4984,7 +4646,7 @@
               </a:lnSpc>
             </a:pPr>
             <a:r>
-              <a:rPr lang="ru-RU" sz="1100" b="1" dirty="0">
+              <a:rPr lang="ru-RU" sz="1600" b="1" dirty="0">
                 <a:solidFill>
                   <a:srgbClr val="000000"/>
                 </a:solidFill>
@@ -4995,7 +4657,7 @@
               <a:t>Класс «Пользователь» </a:t>
             </a:r>
             <a:r>
-              <a:rPr lang="ru-RU" sz="1100" dirty="0">
+              <a:rPr lang="ru-RU" sz="1600" dirty="0">
                 <a:solidFill>
                   <a:srgbClr val="000000"/>
                 </a:solidFill>
@@ -5013,7 +4675,7 @@
               </a:lnSpc>
             </a:pPr>
             <a:r>
-              <a:rPr lang="ru-RU" sz="1100" b="1" dirty="0">
+              <a:rPr lang="ru-RU" sz="1600" b="1" dirty="0">
                 <a:solidFill>
                   <a:srgbClr val="000000"/>
                 </a:solidFill>
@@ -5024,7 +4686,7 @@
               <a:t>Класс «Клиент» </a:t>
             </a:r>
             <a:r>
-              <a:rPr lang="ru-RU" sz="1100" dirty="0">
+              <a:rPr lang="ru-RU" sz="1600" dirty="0">
                 <a:solidFill>
                   <a:srgbClr val="000000"/>
                 </a:solidFill>
@@ -5042,7 +4704,7 @@
               </a:lnSpc>
             </a:pPr>
             <a:r>
-              <a:rPr lang="ru-RU" sz="1100" b="1" dirty="0">
+              <a:rPr lang="ru-RU" sz="1600" b="1" dirty="0">
                 <a:solidFill>
                   <a:srgbClr val="000000"/>
                 </a:solidFill>
@@ -5053,7 +4715,7 @@
               <a:t>Класс «Сборочный заказ» </a:t>
             </a:r>
             <a:r>
-              <a:rPr lang="ru-RU" sz="1100" dirty="0">
+              <a:rPr lang="ru-RU" sz="1600" dirty="0">
                 <a:solidFill>
                   <a:srgbClr val="000000"/>
                 </a:solidFill>
@@ -5071,7 +4733,7 @@
               </a:lnSpc>
             </a:pPr>
             <a:r>
-              <a:rPr lang="ru-RU" sz="1100" b="1" dirty="0">
+              <a:rPr lang="ru-RU" sz="1600" b="1" dirty="0">
                 <a:solidFill>
                   <a:srgbClr val="000000"/>
                 </a:solidFill>
@@ -5082,7 +4744,7 @@
               <a:t>Класс «Продажа» </a:t>
             </a:r>
             <a:r>
-              <a:rPr lang="ru-RU" sz="1100" dirty="0">
+              <a:rPr lang="ru-RU" sz="1600" dirty="0">
                 <a:solidFill>
                   <a:srgbClr val="000000"/>
                 </a:solidFill>
@@ -5093,7 +4755,7 @@
               <a:t>— атрибуты: идентификатор продажи, идентификатор клиента, общая сумма, статус, идентификатор создавшего пользователя; методы: рассчитать итог продажи, обработать оплату, отменить продажу, сгенерировать счет, обновить статус оплаты, применить </a:t>
             </a:r>
             <a:r>
-              <a:rPr lang="ru-RU" sz="1100" dirty="0" err="1">
+              <a:rPr lang="ru-RU" sz="1600" dirty="0" err="1">
                 <a:solidFill>
                   <a:srgbClr val="000000"/>
                 </a:solidFill>
@@ -5103,7 +4765,7 @@
               </a:rPr>
               <a:t>промокод</a:t>
             </a:r>
-            <a:endParaRPr lang="ru-RU" sz="1100" dirty="0">
+            <a:endParaRPr lang="ru-RU" sz="1600" dirty="0">
               <a:solidFill>
                 <a:srgbClr val="000000"/>
               </a:solidFill>
@@ -5119,7 +4781,7 @@
               </a:lnSpc>
             </a:pPr>
             <a:r>
-              <a:rPr lang="ru-RU" sz="1100" b="1" dirty="0">
+              <a:rPr lang="ru-RU" sz="1600" b="1" dirty="0">
                 <a:solidFill>
                   <a:srgbClr val="000000"/>
                 </a:solidFill>
@@ -5130,7 +4792,7 @@
               <a:t>Класс «Заказ поставщику» </a:t>
             </a:r>
             <a:r>
-              <a:rPr lang="ru-RU" sz="1100" dirty="0">
+              <a:rPr lang="ru-RU" sz="1600" dirty="0">
                 <a:solidFill>
                   <a:srgbClr val="000000"/>
                 </a:solidFill>
@@ -5140,184 +4802,6 @@
               </a:rPr>
               <a:t>— атрибуты: идентификатор заказа, идентификатор поставщика, дата заказа, ожидаемая дата поставки; методы: рассчитать общую сумму, обновить дату поставки, подтвердить заказ, отменить заказ</a:t>
             </a:r>
-          </a:p>
-          <a:p>
-            <a:pPr>
-              <a:lnSpc>
-                <a:spcPct val="150000"/>
-              </a:lnSpc>
-            </a:pPr>
-            <a:r>
-              <a:rPr lang="ru-RU" sz="1100" b="1" dirty="0">
-                <a:solidFill>
-                  <a:srgbClr val="000000"/>
-                </a:solidFill>
-                <a:latin typeface="Times New Roman" panose="02020603050405020304" pitchFamily="18" charset="0"/>
-                <a:ea typeface="QuattrocentoSans" pitchFamily="34" charset="-122"/>
-                <a:cs typeface="Times New Roman" panose="02020603050405020304" pitchFamily="18" charset="0"/>
-              </a:rPr>
-              <a:t>Класс «Проданный товар» </a:t>
-            </a:r>
-            <a:r>
-              <a:rPr lang="ru-RU" sz="1100" dirty="0">
-                <a:solidFill>
-                  <a:srgbClr val="000000"/>
-                </a:solidFill>
-                <a:latin typeface="Times New Roman" panose="02020603050405020304" pitchFamily="18" charset="0"/>
-                <a:ea typeface="QuattrocentoSans" pitchFamily="34" charset="-122"/>
-                <a:cs typeface="Times New Roman" panose="02020603050405020304" pitchFamily="18" charset="0"/>
-              </a:rPr>
-              <a:t>— атрибуты: идентификатор позиции продажи, идентификатор продажи, идентификатор склада, количество; методы: рассчитать итог продажи, применить скидку, проверить остаток на складе</a:t>
-            </a:r>
-          </a:p>
-          <a:p>
-            <a:pPr>
-              <a:lnSpc>
-                <a:spcPct val="150000"/>
-              </a:lnSpc>
-            </a:pPr>
-            <a:r>
-              <a:rPr lang="ru-RU" sz="1100" b="1" dirty="0">
-                <a:solidFill>
-                  <a:srgbClr val="000000"/>
-                </a:solidFill>
-                <a:latin typeface="Times New Roman" panose="02020603050405020304" pitchFamily="18" charset="0"/>
-                <a:ea typeface="QuattrocentoSans" pitchFamily="34" charset="-122"/>
-                <a:cs typeface="Times New Roman" panose="02020603050405020304" pitchFamily="18" charset="0"/>
-              </a:rPr>
-              <a:t>Класс «Склад» </a:t>
-            </a:r>
-            <a:r>
-              <a:rPr lang="ru-RU" sz="1100" dirty="0">
-                <a:solidFill>
-                  <a:srgbClr val="000000"/>
-                </a:solidFill>
-                <a:latin typeface="Times New Roman" panose="02020603050405020304" pitchFamily="18" charset="0"/>
-                <a:ea typeface="QuattrocentoSans" pitchFamily="34" charset="-122"/>
-                <a:cs typeface="Times New Roman" panose="02020603050405020304" pitchFamily="18" charset="0"/>
-              </a:rPr>
-              <a:t>— атрибуты: идентификатор склада, идентификатор продукта, количество; методы: обновить остаток, получить текущий остаток, зарезервировать остаток, проверить сигнал о низком остатке</a:t>
-            </a:r>
-          </a:p>
-          <a:p>
-            <a:pPr>
-              <a:lnSpc>
-                <a:spcPct val="150000"/>
-              </a:lnSpc>
-            </a:pPr>
-            <a:r>
-              <a:rPr lang="ru-RU" sz="1100" b="1" dirty="0">
-                <a:solidFill>
-                  <a:srgbClr val="000000"/>
-                </a:solidFill>
-                <a:latin typeface="Times New Roman" panose="02020603050405020304" pitchFamily="18" charset="0"/>
-                <a:ea typeface="QuattrocentoSans" pitchFamily="34" charset="-122"/>
-                <a:cs typeface="Times New Roman" panose="02020603050405020304" pitchFamily="18" charset="0"/>
-              </a:rPr>
-              <a:t>Класс «Поставщик» </a:t>
-            </a:r>
-            <a:r>
-              <a:rPr lang="ru-RU" sz="1100" dirty="0">
-                <a:solidFill>
-                  <a:srgbClr val="000000"/>
-                </a:solidFill>
-                <a:latin typeface="Times New Roman" panose="02020603050405020304" pitchFamily="18" charset="0"/>
-                <a:ea typeface="QuattrocentoSans" pitchFamily="34" charset="-122"/>
-                <a:cs typeface="Times New Roman" panose="02020603050405020304" pitchFamily="18" charset="0"/>
-              </a:rPr>
-              <a:t>— атрибуты: идентификатор поставщика, название компании, контактное лицо, телефон; методы: добавить новый продукт, получить заказы поставщика, обновить контактную информацию</a:t>
-            </a:r>
-          </a:p>
-          <a:p>
-            <a:pPr>
-              <a:lnSpc>
-                <a:spcPct val="150000"/>
-              </a:lnSpc>
-            </a:pPr>
-            <a:r>
-              <a:rPr lang="ru-RU" sz="1100" b="1" dirty="0">
-                <a:solidFill>
-                  <a:srgbClr val="000000"/>
-                </a:solidFill>
-                <a:latin typeface="Times New Roman" panose="02020603050405020304" pitchFamily="18" charset="0"/>
-                <a:ea typeface="QuattrocentoSans" pitchFamily="34" charset="-122"/>
-                <a:cs typeface="Times New Roman" panose="02020603050405020304" pitchFamily="18" charset="0"/>
-              </a:rPr>
-              <a:t>Класс «Товар заказа поставщику» </a:t>
-            </a:r>
-            <a:r>
-              <a:rPr lang="ru-RU" sz="1100" dirty="0">
-                <a:solidFill>
-                  <a:srgbClr val="000000"/>
-                </a:solidFill>
-                <a:latin typeface="Times New Roman" panose="02020603050405020304" pitchFamily="18" charset="0"/>
-                <a:ea typeface="QuattrocentoSans" pitchFamily="34" charset="-122"/>
-                <a:cs typeface="Times New Roman" panose="02020603050405020304" pitchFamily="18" charset="0"/>
-              </a:rPr>
-              <a:t>— атрибуты: идентификатор позиции заказа, идентификатор заказа, идентификатор продукта, количество, цена за единицу; методы: рассчитать итог позиции, обновить количество, проверить доступность на складе</a:t>
-            </a:r>
-          </a:p>
-          <a:p>
-            <a:pPr>
-              <a:lnSpc>
-                <a:spcPct val="150000"/>
-              </a:lnSpc>
-            </a:pPr>
-            <a:r>
-              <a:rPr lang="ru-RU" sz="1100" b="1" dirty="0">
-                <a:solidFill>
-                  <a:srgbClr val="000000"/>
-                </a:solidFill>
-                <a:latin typeface="Times New Roman" panose="02020603050405020304" pitchFamily="18" charset="0"/>
-                <a:ea typeface="QuattrocentoSans" pitchFamily="34" charset="-122"/>
-                <a:cs typeface="Times New Roman" panose="02020603050405020304" pitchFamily="18" charset="0"/>
-              </a:rPr>
-              <a:t>Класс «Продукт» </a:t>
-            </a:r>
-            <a:r>
-              <a:rPr lang="ru-RU" sz="1100" dirty="0">
-                <a:solidFill>
-                  <a:srgbClr val="000000"/>
-                </a:solidFill>
-                <a:latin typeface="Times New Roman" panose="02020603050405020304" pitchFamily="18" charset="0"/>
-                <a:ea typeface="QuattrocentoSans" pitchFamily="34" charset="-122"/>
-                <a:cs typeface="Times New Roman" panose="02020603050405020304" pitchFamily="18" charset="0"/>
-              </a:rPr>
-              <a:t>— атрибуты: идентификатор продукта, название продукта, описание, категория, закупочная цена, цена продажи; методы: обновить цену, проверить доступность, получить информацию о продукте, рассчитать прибыль, обновить категорию</a:t>
-            </a:r>
-          </a:p>
-          <a:p>
-            <a:pPr>
-              <a:lnSpc>
-                <a:spcPct val="150000"/>
-              </a:lnSpc>
-            </a:pPr>
-            <a:r>
-              <a:rPr lang="ru-RU" sz="1100" b="1" dirty="0">
-                <a:solidFill>
-                  <a:srgbClr val="000000"/>
-                </a:solidFill>
-                <a:latin typeface="Times New Roman" panose="02020603050405020304" pitchFamily="18" charset="0"/>
-                <a:ea typeface="QuattrocentoSans" pitchFamily="34" charset="-122"/>
-                <a:cs typeface="Times New Roman" panose="02020603050405020304" pitchFamily="18" charset="0"/>
-              </a:rPr>
-              <a:t>Класс «Категория» </a:t>
-            </a:r>
-            <a:r>
-              <a:rPr lang="ru-RU" sz="1100" dirty="0">
-                <a:solidFill>
-                  <a:srgbClr val="000000"/>
-                </a:solidFill>
-                <a:latin typeface="Times New Roman" panose="02020603050405020304" pitchFamily="18" charset="0"/>
-                <a:ea typeface="QuattrocentoSans" pitchFamily="34" charset="-122"/>
-                <a:cs typeface="Times New Roman" panose="02020603050405020304" pitchFamily="18" charset="0"/>
-              </a:rPr>
-              <a:t>— атрибуты: идентификатор категории, название, описание, родительская категория.</a:t>
-            </a:r>
-            <a:endParaRPr lang="en-US" sz="1100" dirty="0">
-              <a:latin typeface="Times New Roman" panose="02020603050405020304" pitchFamily="18" charset="0"/>
-              <a:cs typeface="Times New Roman" panose="02020603050405020304" pitchFamily="18" charset="0"/>
-            </a:endParaRPr>
           </a:p>
         </p:txBody>
       </p:sp>
@@ -10877,7 +10361,29 @@
                 <a:ea typeface="QuattrocentoSans" pitchFamily="34" charset="-122"/>
                 <a:cs typeface="Times New Roman" panose="02020603050405020304" pitchFamily="18" charset="0"/>
               </a:rPr>
-              <a:t>ДИАГРАММА ВАРИАНТОВ ИСПОЛЬЗОВАНИЯ</a:t>
+              <a:t>ДИАГРАММА ВАРИАНТОВ ИСПОЛЬЗОВАНИЯ </a:t>
+            </a:r>
+            <a:r>
+              <a:rPr lang="ru-RU" sz="3600" b="1" dirty="0">
+                <a:solidFill>
+                  <a:srgbClr val="000000"/>
+                </a:solidFill>
+                <a:latin typeface="Times New Roman" panose="02020603050405020304" pitchFamily="18" charset="0"/>
+                <a:ea typeface="QuattrocentoSans" pitchFamily="34" charset="-122"/>
+                <a:cs typeface="Times New Roman" panose="02020603050405020304" pitchFamily="18" charset="0"/>
+              </a:rPr>
+              <a:t>(</a:t>
+            </a:r>
+            <a:r>
+              <a:rPr lang="en-US" sz="3600" b="1" dirty="0">
+                <a:solidFill>
+                  <a:srgbClr val="000000"/>
+                </a:solidFill>
+                <a:latin typeface="Times New Roman" panose="02020603050405020304" pitchFamily="18" charset="0"/>
+                <a:ea typeface="QuattrocentoSans" pitchFamily="34" charset="-122"/>
+                <a:cs typeface="Times New Roman" panose="02020603050405020304" pitchFamily="18" charset="0"/>
+              </a:rPr>
+              <a:t>USE CASE)</a:t>
             </a:r>
             <a:endParaRPr lang="en-US" sz="3600" dirty="0">
               <a:latin typeface="Times New Roman" panose="02020603050405020304" pitchFamily="18" charset="0"/>

--- a/диплом.pptx
+++ b/диплом.pptx
@@ -2572,7 +2572,7 @@
                 <a:ea typeface="Quattrocento Sans" pitchFamily="34" charset="-122"/>
                 <a:cs typeface="Times New Roman" panose="02020603050405020304" pitchFamily="18" charset="0"/>
               </a:rPr>
-              <a:t>Разработка информационной системы «Компьютерный магазин» на 1С:Предприятие</a:t>
+              <a:t>Разработка информационной системы «Компьютерный магазин» на платформе 1С:Предприятие</a:t>
             </a:r>
             <a:endParaRPr lang="en-US" sz="1600" dirty="0">
               <a:latin typeface="Times New Roman" panose="02020603050405020304" pitchFamily="18" charset="0"/>
